--- a/CKDSurveillance/PPT/Q805.pptx
+++ b/CKDSurveillance/PPT/Q805.pptx
@@ -138,8 +138,280 @@
         <c:grouping val="standard"/>
         <c:varyColors val="0"/>
         <c:ser>
+          <c:idx val="1"/>
+          <c:order val="0"/>
+          <c:tx>
+            <c:strRef>
+              <c:f>' HTN'!$E$30</c:f>
+              <c:strCache>
+                <c:ptCount val="1"/>
+                <c:pt idx="0">
+                  <c:v>With CKD</c:v>
+                </c:pt>
+              </c:strCache>
+            </c:strRef>
+          </c:tx>
+          <c:spPr>
+            <a:ln w="44450" cap="rnd">
+              <a:solidFill>
+                <a:schemeClr val="accent2"/>
+              </a:solidFill>
+              <a:round/>
+            </a:ln>
+            <a:effectLst/>
+          </c:spPr>
+          <c:marker>
+            <c:symbol val="circle"/>
+            <c:size val="5"/>
+            <c:spPr>
+              <a:solidFill>
+                <a:schemeClr val="accent2"/>
+              </a:solidFill>
+              <a:ln w="9525">
+                <a:solidFill>
+                  <a:schemeClr val="accent2"/>
+                </a:solidFill>
+              </a:ln>
+              <a:effectLst/>
+            </c:spPr>
+          </c:marker>
+          <c:errBars>
+            <c:errDir val="y"/>
+            <c:errBarType val="both"/>
+            <c:errValType val="cust"/>
+            <c:noEndCap val="0"/>
+            <c:plus>
+              <c:numRef>
+                <c:f>' HTN'!$J$14:$J$18</c:f>
+                <c:numCache>
+                  <c:formatCode>General</c:formatCode>
+                  <c:ptCount val="5"/>
+                  <c:pt idx="0">
+                    <c:v>1.9123590000000024E-2</c:v>
+                  </c:pt>
+                  <c:pt idx="1">
+                    <c:v>1.6863930000000027E-2</c:v>
+                  </c:pt>
+                  <c:pt idx="2">
+                    <c:v>2.0218370000000041E-2</c:v>
+                  </c:pt>
+                  <c:pt idx="3">
+                    <c:v>1.6014490000000048E-2</c:v>
+                  </c:pt>
+                  <c:pt idx="4">
+                    <c:v>2.7629379999999981E-2</c:v>
+                  </c:pt>
+                </c:numCache>
+              </c:numRef>
+            </c:plus>
+            <c:minus>
+              <c:numRef>
+                <c:f>' HTN'!$K$14:$K$18</c:f>
+                <c:numCache>
+                  <c:formatCode>General</c:formatCode>
+                  <c:ptCount val="5"/>
+                  <c:pt idx="0">
+                    <c:v>1.9124560000000013E-2</c:v>
+                  </c:pt>
+                  <c:pt idx="1">
+                    <c:v>1.6863760000000005E-2</c:v>
+                  </c:pt>
+                  <c:pt idx="2">
+                    <c:v>2.0218759999999947E-2</c:v>
+                  </c:pt>
+                  <c:pt idx="3">
+                    <c:v>1.6015069999999965E-2</c:v>
+                  </c:pt>
+                  <c:pt idx="4">
+                    <c:v>2.7630129999999975E-2</c:v>
+                  </c:pt>
+                </c:numCache>
+              </c:numRef>
+            </c:minus>
+            <c:spPr>
+              <a:noFill/>
+              <a:ln w="9525" cap="flat" cmpd="sng" algn="ctr">
+                <a:solidFill>
+                  <a:schemeClr val="tx1">
+                    <a:lumMod val="65000"/>
+                    <a:lumOff val="35000"/>
+                  </a:schemeClr>
+                </a:solidFill>
+                <a:round/>
+              </a:ln>
+              <a:effectLst/>
+            </c:spPr>
+          </c:errBars>
+          <c:val>
+            <c:numRef>
+              <c:f>' HTN'!$E$31:$E$35</c:f>
+              <c:numCache>
+                <c:formatCode>0.0%</c:formatCode>
+                <c:ptCount val="5"/>
+                <c:pt idx="0">
+                  <c:v>0.75670300000000001</c:v>
+                </c:pt>
+                <c:pt idx="1">
+                  <c:v>0.75242600000000004</c:v>
+                </c:pt>
+                <c:pt idx="2">
+                  <c:v>0.75661299999999998</c:v>
+                </c:pt>
+                <c:pt idx="3">
+                  <c:v>0.75988800000000001</c:v>
+                </c:pt>
+                <c:pt idx="4">
+                  <c:v>0.78009099999999998</c:v>
+                </c:pt>
+              </c:numCache>
+            </c:numRef>
+          </c:val>
+          <c:smooth val="0"/>
+          <c:extLst>
+            <c:ext xmlns:c16="http://schemas.microsoft.com/office/drawing/2014/chart" uri="{C3380CC4-5D6E-409C-BE32-E72D297353CC}">
+              <c16:uniqueId val="{00000001-AE7D-4387-A0D1-F8F311ABFA79}"/>
+            </c:ext>
+          </c:extLst>
+        </c:ser>
+        <c:ser>
+          <c:idx val="2"/>
+          <c:order val="1"/>
+          <c:tx>
+            <c:strRef>
+              <c:f>' HTN'!$D$30</c:f>
+              <c:strCache>
+                <c:ptCount val="1"/>
+                <c:pt idx="0">
+                  <c:v>Without CKD</c:v>
+                </c:pt>
+              </c:strCache>
+            </c:strRef>
+          </c:tx>
+          <c:spPr>
+            <a:ln w="44450" cap="rnd">
+              <a:solidFill>
+                <a:schemeClr val="accent3"/>
+              </a:solidFill>
+              <a:round/>
+            </a:ln>
+            <a:effectLst/>
+          </c:spPr>
+          <c:marker>
+            <c:symbol val="circle"/>
+            <c:size val="5"/>
+            <c:spPr>
+              <a:solidFill>
+                <a:schemeClr val="accent3"/>
+              </a:solidFill>
+              <a:ln w="9525">
+                <a:solidFill>
+                  <a:schemeClr val="accent3"/>
+                </a:solidFill>
+              </a:ln>
+              <a:effectLst/>
+            </c:spPr>
+          </c:marker>
+          <c:errBars>
+            <c:errDir val="y"/>
+            <c:errBarType val="both"/>
+            <c:errValType val="cust"/>
+            <c:noEndCap val="0"/>
+            <c:plus>
+              <c:numRef>
+                <c:f>' HTN'!$J$19:$J$23</c:f>
+                <c:numCache>
+                  <c:formatCode>General</c:formatCode>
+                  <c:ptCount val="5"/>
+                  <c:pt idx="0">
+                    <c:v>3.092455999999999E-2</c:v>
+                  </c:pt>
+                  <c:pt idx="1">
+                    <c:v>1.9539410000000035E-2</c:v>
+                  </c:pt>
+                  <c:pt idx="2">
+                    <c:v>3.5632589999999964E-2</c:v>
+                  </c:pt>
+                  <c:pt idx="3">
+                    <c:v>3.0869060000000004E-2</c:v>
+                  </c:pt>
+                  <c:pt idx="4">
+                    <c:v>3.1681619999999966E-2</c:v>
+                  </c:pt>
+                </c:numCache>
+              </c:numRef>
+            </c:plus>
+            <c:minus>
+              <c:numRef>
+                <c:f>' HTN'!$K$19:$K$23</c:f>
+                <c:numCache>
+                  <c:formatCode>General</c:formatCode>
+                  <c:ptCount val="5"/>
+                  <c:pt idx="0">
+                    <c:v>3.0925059999999949E-2</c:v>
+                  </c:pt>
+                  <c:pt idx="1">
+                    <c:v>1.9539639999999969E-2</c:v>
+                  </c:pt>
+                  <c:pt idx="2">
+                    <c:v>3.5632760000000041E-2</c:v>
+                  </c:pt>
+                  <c:pt idx="3">
+                    <c:v>3.086875E-2</c:v>
+                  </c:pt>
+                  <c:pt idx="4">
+                    <c:v>3.1681489999999979E-2</c:v>
+                  </c:pt>
+                </c:numCache>
+              </c:numRef>
+            </c:minus>
+            <c:spPr>
+              <a:noFill/>
+              <a:ln w="9525" cap="flat" cmpd="sng" algn="ctr">
+                <a:solidFill>
+                  <a:schemeClr val="tx1">
+                    <a:lumMod val="65000"/>
+                    <a:lumOff val="35000"/>
+                  </a:schemeClr>
+                </a:solidFill>
+                <a:round/>
+              </a:ln>
+              <a:effectLst/>
+            </c:spPr>
+          </c:errBars>
+          <c:val>
+            <c:numRef>
+              <c:f>' HTN'!$D$31:$D$35</c:f>
+              <c:numCache>
+                <c:formatCode>0.0%</c:formatCode>
+                <c:ptCount val="5"/>
+                <c:pt idx="0">
+                  <c:v>0.459397</c:v>
+                </c:pt>
+                <c:pt idx="1">
+                  <c:v>0.44847900000000002</c:v>
+                </c:pt>
+                <c:pt idx="2">
+                  <c:v>0.44798900000000003</c:v>
+                </c:pt>
+                <c:pt idx="3">
+                  <c:v>0.45472800000000002</c:v>
+                </c:pt>
+                <c:pt idx="4">
+                  <c:v>0.49162699999999998</c:v>
+                </c:pt>
+              </c:numCache>
+            </c:numRef>
+          </c:val>
+          <c:smooth val="0"/>
+          <c:extLst>
+            <c:ext xmlns:c16="http://schemas.microsoft.com/office/drawing/2014/chart" uri="{C3380CC4-5D6E-409C-BE32-E72D297353CC}">
+              <c16:uniqueId val="{00000002-AE7D-4387-A0D1-F8F311ABFA79}"/>
+            </c:ext>
+          </c:extLst>
+        </c:ser>
+        <c:ser>
           <c:idx val="0"/>
-          <c:order val="0"/>
+          <c:order val="2"/>
           <c:tx>
             <c:strRef>
               <c:f>' HTN'!$C$30</c:f>
@@ -294,278 +566,6 @@
           <c:extLst>
             <c:ext xmlns:c16="http://schemas.microsoft.com/office/drawing/2014/chart" uri="{C3380CC4-5D6E-409C-BE32-E72D297353CC}">
               <c16:uniqueId val="{00000000-AE7D-4387-A0D1-F8F311ABFA79}"/>
-            </c:ext>
-          </c:extLst>
-        </c:ser>
-        <c:ser>
-          <c:idx val="1"/>
-          <c:order val="1"/>
-          <c:tx>
-            <c:strRef>
-              <c:f>' HTN'!$E$30</c:f>
-              <c:strCache>
-                <c:ptCount val="1"/>
-                <c:pt idx="0">
-                  <c:v>CKD</c:v>
-                </c:pt>
-              </c:strCache>
-            </c:strRef>
-          </c:tx>
-          <c:spPr>
-            <a:ln w="44450" cap="rnd">
-              <a:solidFill>
-                <a:schemeClr val="accent2"/>
-              </a:solidFill>
-              <a:round/>
-            </a:ln>
-            <a:effectLst/>
-          </c:spPr>
-          <c:marker>
-            <c:symbol val="circle"/>
-            <c:size val="5"/>
-            <c:spPr>
-              <a:solidFill>
-                <a:schemeClr val="accent2"/>
-              </a:solidFill>
-              <a:ln w="9525">
-                <a:solidFill>
-                  <a:schemeClr val="accent2"/>
-                </a:solidFill>
-              </a:ln>
-              <a:effectLst/>
-            </c:spPr>
-          </c:marker>
-          <c:errBars>
-            <c:errDir val="y"/>
-            <c:errBarType val="both"/>
-            <c:errValType val="cust"/>
-            <c:noEndCap val="0"/>
-            <c:plus>
-              <c:numRef>
-                <c:f>' HTN'!$J$14:$J$18</c:f>
-                <c:numCache>
-                  <c:formatCode>General</c:formatCode>
-                  <c:ptCount val="5"/>
-                  <c:pt idx="0">
-                    <c:v>1.9123590000000024E-2</c:v>
-                  </c:pt>
-                  <c:pt idx="1">
-                    <c:v>1.6863930000000027E-2</c:v>
-                  </c:pt>
-                  <c:pt idx="2">
-                    <c:v>2.0218370000000041E-2</c:v>
-                  </c:pt>
-                  <c:pt idx="3">
-                    <c:v>1.6014490000000048E-2</c:v>
-                  </c:pt>
-                  <c:pt idx="4">
-                    <c:v>2.7629379999999981E-2</c:v>
-                  </c:pt>
-                </c:numCache>
-              </c:numRef>
-            </c:plus>
-            <c:minus>
-              <c:numRef>
-                <c:f>' HTN'!$K$14:$K$18</c:f>
-                <c:numCache>
-                  <c:formatCode>General</c:formatCode>
-                  <c:ptCount val="5"/>
-                  <c:pt idx="0">
-                    <c:v>1.9124560000000013E-2</c:v>
-                  </c:pt>
-                  <c:pt idx="1">
-                    <c:v>1.6863760000000005E-2</c:v>
-                  </c:pt>
-                  <c:pt idx="2">
-                    <c:v>2.0218759999999947E-2</c:v>
-                  </c:pt>
-                  <c:pt idx="3">
-                    <c:v>1.6015069999999965E-2</c:v>
-                  </c:pt>
-                  <c:pt idx="4">
-                    <c:v>2.7630129999999975E-2</c:v>
-                  </c:pt>
-                </c:numCache>
-              </c:numRef>
-            </c:minus>
-            <c:spPr>
-              <a:noFill/>
-              <a:ln w="9525" cap="flat" cmpd="sng" algn="ctr">
-                <a:solidFill>
-                  <a:schemeClr val="tx1">
-                    <a:lumMod val="65000"/>
-                    <a:lumOff val="35000"/>
-                  </a:schemeClr>
-                </a:solidFill>
-                <a:round/>
-              </a:ln>
-              <a:effectLst/>
-            </c:spPr>
-          </c:errBars>
-          <c:val>
-            <c:numRef>
-              <c:f>' HTN'!$E$31:$E$35</c:f>
-              <c:numCache>
-                <c:formatCode>0.0%</c:formatCode>
-                <c:ptCount val="5"/>
-                <c:pt idx="0">
-                  <c:v>0.75670300000000001</c:v>
-                </c:pt>
-                <c:pt idx="1">
-                  <c:v>0.75242600000000004</c:v>
-                </c:pt>
-                <c:pt idx="2">
-                  <c:v>0.75661299999999998</c:v>
-                </c:pt>
-                <c:pt idx="3">
-                  <c:v>0.75988800000000001</c:v>
-                </c:pt>
-                <c:pt idx="4">
-                  <c:v>0.78009099999999998</c:v>
-                </c:pt>
-              </c:numCache>
-            </c:numRef>
-          </c:val>
-          <c:smooth val="0"/>
-          <c:extLst>
-            <c:ext xmlns:c16="http://schemas.microsoft.com/office/drawing/2014/chart" uri="{C3380CC4-5D6E-409C-BE32-E72D297353CC}">
-              <c16:uniqueId val="{00000001-AE7D-4387-A0D1-F8F311ABFA79}"/>
-            </c:ext>
-          </c:extLst>
-        </c:ser>
-        <c:ser>
-          <c:idx val="2"/>
-          <c:order val="2"/>
-          <c:tx>
-            <c:strRef>
-              <c:f>' HTN'!$D$30</c:f>
-              <c:strCache>
-                <c:ptCount val="1"/>
-                <c:pt idx="0">
-                  <c:v>No CKD</c:v>
-                </c:pt>
-              </c:strCache>
-            </c:strRef>
-          </c:tx>
-          <c:spPr>
-            <a:ln w="44450" cap="rnd">
-              <a:solidFill>
-                <a:schemeClr val="accent3"/>
-              </a:solidFill>
-              <a:round/>
-            </a:ln>
-            <a:effectLst/>
-          </c:spPr>
-          <c:marker>
-            <c:symbol val="circle"/>
-            <c:size val="5"/>
-            <c:spPr>
-              <a:solidFill>
-                <a:schemeClr val="accent3"/>
-              </a:solidFill>
-              <a:ln w="9525">
-                <a:solidFill>
-                  <a:schemeClr val="accent3"/>
-                </a:solidFill>
-              </a:ln>
-              <a:effectLst/>
-            </c:spPr>
-          </c:marker>
-          <c:errBars>
-            <c:errDir val="y"/>
-            <c:errBarType val="both"/>
-            <c:errValType val="cust"/>
-            <c:noEndCap val="0"/>
-            <c:plus>
-              <c:numRef>
-                <c:f>' HTN'!$J$19:$J$23</c:f>
-                <c:numCache>
-                  <c:formatCode>General</c:formatCode>
-                  <c:ptCount val="5"/>
-                  <c:pt idx="0">
-                    <c:v>3.092455999999999E-2</c:v>
-                  </c:pt>
-                  <c:pt idx="1">
-                    <c:v>1.9539410000000035E-2</c:v>
-                  </c:pt>
-                  <c:pt idx="2">
-                    <c:v>3.5632589999999964E-2</c:v>
-                  </c:pt>
-                  <c:pt idx="3">
-                    <c:v>3.0869060000000004E-2</c:v>
-                  </c:pt>
-                  <c:pt idx="4">
-                    <c:v>3.1681619999999966E-2</c:v>
-                  </c:pt>
-                </c:numCache>
-              </c:numRef>
-            </c:plus>
-            <c:minus>
-              <c:numRef>
-                <c:f>' HTN'!$K$19:$K$23</c:f>
-                <c:numCache>
-                  <c:formatCode>General</c:formatCode>
-                  <c:ptCount val="5"/>
-                  <c:pt idx="0">
-                    <c:v>3.0925059999999949E-2</c:v>
-                  </c:pt>
-                  <c:pt idx="1">
-                    <c:v>1.9539639999999969E-2</c:v>
-                  </c:pt>
-                  <c:pt idx="2">
-                    <c:v>3.5632760000000041E-2</c:v>
-                  </c:pt>
-                  <c:pt idx="3">
-                    <c:v>3.086875E-2</c:v>
-                  </c:pt>
-                  <c:pt idx="4">
-                    <c:v>3.1681489999999979E-2</c:v>
-                  </c:pt>
-                </c:numCache>
-              </c:numRef>
-            </c:minus>
-            <c:spPr>
-              <a:noFill/>
-              <a:ln w="9525" cap="flat" cmpd="sng" algn="ctr">
-                <a:solidFill>
-                  <a:schemeClr val="tx1">
-                    <a:lumMod val="65000"/>
-                    <a:lumOff val="35000"/>
-                  </a:schemeClr>
-                </a:solidFill>
-                <a:round/>
-              </a:ln>
-              <a:effectLst/>
-            </c:spPr>
-          </c:errBars>
-          <c:val>
-            <c:numRef>
-              <c:f>' HTN'!$D$31:$D$35</c:f>
-              <c:numCache>
-                <c:formatCode>0.0%</c:formatCode>
-                <c:ptCount val="5"/>
-                <c:pt idx="0">
-                  <c:v>0.459397</c:v>
-                </c:pt>
-                <c:pt idx="1">
-                  <c:v>0.44847900000000002</c:v>
-                </c:pt>
-                <c:pt idx="2">
-                  <c:v>0.44798900000000003</c:v>
-                </c:pt>
-                <c:pt idx="3">
-                  <c:v>0.45472800000000002</c:v>
-                </c:pt>
-                <c:pt idx="4">
-                  <c:v>0.49162699999999998</c:v>
-                </c:pt>
-              </c:numCache>
-            </c:numRef>
-          </c:val>
-          <c:smooth val="0"/>
-          <c:extLst>
-            <c:ext xmlns:c16="http://schemas.microsoft.com/office/drawing/2014/chart" uri="{C3380CC4-5D6E-409C-BE32-E72D297353CC}">
-              <c16:uniqueId val="{00000002-AE7D-4387-A0D1-F8F311ABFA79}"/>
             </c:ext>
           </c:extLst>
         </c:ser>
@@ -669,8 +669,8 @@
                   </a:defRPr>
                 </a:pPr>
                 <a:r>
-                  <a:rPr lang="en-US"/>
-                  <a:t>% Hypertension</a:t>
+                  <a:rPr lang="en-US" dirty="0"/>
+                  <a:t>Hypertension (%)</a:t>
                 </a:r>
               </a:p>
             </c:rich>
@@ -828,8 +828,280 @@
         <c:grouping val="standard"/>
         <c:varyColors val="0"/>
         <c:ser>
+          <c:idx val="1"/>
+          <c:order val="0"/>
+          <c:tx>
+            <c:strRef>
+              <c:f>'HTN (Age Std)'!$E$30</c:f>
+              <c:strCache>
+                <c:ptCount val="1"/>
+                <c:pt idx="0">
+                  <c:v>With CKD</c:v>
+                </c:pt>
+              </c:strCache>
+            </c:strRef>
+          </c:tx>
+          <c:spPr>
+            <a:ln w="44450" cap="rnd">
+              <a:solidFill>
+                <a:schemeClr val="accent2"/>
+              </a:solidFill>
+              <a:round/>
+            </a:ln>
+            <a:effectLst/>
+          </c:spPr>
+          <c:marker>
+            <c:symbol val="circle"/>
+            <c:size val="5"/>
+            <c:spPr>
+              <a:solidFill>
+                <a:schemeClr val="accent2"/>
+              </a:solidFill>
+              <a:ln w="9525">
+                <a:solidFill>
+                  <a:schemeClr val="accent2"/>
+                </a:solidFill>
+              </a:ln>
+              <a:effectLst/>
+            </c:spPr>
+          </c:marker>
+          <c:errBars>
+            <c:errDir val="y"/>
+            <c:errBarType val="both"/>
+            <c:errValType val="cust"/>
+            <c:noEndCap val="0"/>
+            <c:plus>
+              <c:numRef>
+                <c:f>'HTN (Age Std)'!$J$14:$J$18</c:f>
+                <c:numCache>
+                  <c:formatCode>General</c:formatCode>
+                  <c:ptCount val="5"/>
+                  <c:pt idx="0">
+                    <c:v>1.9787810000000017E-2</c:v>
+                  </c:pt>
+                  <c:pt idx="1">
+                    <c:v>1.7944889999999991E-2</c:v>
+                  </c:pt>
+                  <c:pt idx="2">
+                    <c:v>1.5681719999999955E-2</c:v>
+                  </c:pt>
+                  <c:pt idx="3">
+                    <c:v>1.6614069999999981E-2</c:v>
+                  </c:pt>
+                  <c:pt idx="4">
+                    <c:v>2.6458200000000043E-2</c:v>
+                  </c:pt>
+                </c:numCache>
+              </c:numRef>
+            </c:plus>
+            <c:minus>
+              <c:numRef>
+                <c:f>'HTN (Age Std)'!$K$14:$K$18</c:f>
+                <c:numCache>
+                  <c:formatCode>General</c:formatCode>
+                  <c:ptCount val="5"/>
+                  <c:pt idx="0">
+                    <c:v>1.9788290000000042E-2</c:v>
+                  </c:pt>
+                  <c:pt idx="1">
+                    <c:v>1.7945500000000003E-2</c:v>
+                  </c:pt>
+                  <c:pt idx="2">
+                    <c:v>1.5682180000000046E-2</c:v>
+                  </c:pt>
+                  <c:pt idx="3">
+                    <c:v>1.661456E-2</c:v>
+                  </c:pt>
+                  <c:pt idx="4">
+                    <c:v>2.645829999999999E-2</c:v>
+                  </c:pt>
+                </c:numCache>
+              </c:numRef>
+            </c:minus>
+            <c:spPr>
+              <a:noFill/>
+              <a:ln w="9525" cap="flat" cmpd="sng" algn="ctr">
+                <a:solidFill>
+                  <a:schemeClr val="tx1">
+                    <a:lumMod val="65000"/>
+                    <a:lumOff val="35000"/>
+                  </a:schemeClr>
+                </a:solidFill>
+                <a:round/>
+              </a:ln>
+              <a:effectLst/>
+            </c:spPr>
+          </c:errBars>
+          <c:val>
+            <c:numRef>
+              <c:f>'HTN (Age Std)'!$E$31:$E$35</c:f>
+              <c:numCache>
+                <c:formatCode>0.0%</c:formatCode>
+                <c:ptCount val="5"/>
+                <c:pt idx="0">
+                  <c:v>0.63952500000000001</c:v>
+                </c:pt>
+                <c:pt idx="1">
+                  <c:v>0.645366</c:v>
+                </c:pt>
+                <c:pt idx="2">
+                  <c:v>0.621062</c:v>
+                </c:pt>
+                <c:pt idx="3">
+                  <c:v>0.64002999999999999</c:v>
+                </c:pt>
+                <c:pt idx="4">
+                  <c:v>0.65057500000000001</c:v>
+                </c:pt>
+              </c:numCache>
+            </c:numRef>
+          </c:val>
+          <c:smooth val="0"/>
+          <c:extLst>
+            <c:ext xmlns:c16="http://schemas.microsoft.com/office/drawing/2014/chart" uri="{C3380CC4-5D6E-409C-BE32-E72D297353CC}">
+              <c16:uniqueId val="{00000001-C728-4248-B449-4DC8A4F3E1C3}"/>
+            </c:ext>
+          </c:extLst>
+        </c:ser>
+        <c:ser>
+          <c:idx val="2"/>
+          <c:order val="1"/>
+          <c:tx>
+            <c:strRef>
+              <c:f>'HTN (Age Std)'!$D$30</c:f>
+              <c:strCache>
+                <c:ptCount val="1"/>
+                <c:pt idx="0">
+                  <c:v>Without CKD</c:v>
+                </c:pt>
+              </c:strCache>
+            </c:strRef>
+          </c:tx>
+          <c:spPr>
+            <a:ln w="44450" cap="rnd">
+              <a:solidFill>
+                <a:schemeClr val="accent3"/>
+              </a:solidFill>
+              <a:round/>
+            </a:ln>
+            <a:effectLst/>
+          </c:spPr>
+          <c:marker>
+            <c:symbol val="circle"/>
+            <c:size val="5"/>
+            <c:spPr>
+              <a:solidFill>
+                <a:schemeClr val="accent3"/>
+              </a:solidFill>
+              <a:ln w="9525">
+                <a:solidFill>
+                  <a:schemeClr val="accent3"/>
+                </a:solidFill>
+              </a:ln>
+              <a:effectLst/>
+            </c:spPr>
+          </c:marker>
+          <c:errBars>
+            <c:errDir val="y"/>
+            <c:errBarType val="both"/>
+            <c:errValType val="cust"/>
+            <c:noEndCap val="0"/>
+            <c:plus>
+              <c:numRef>
+                <c:f>'HTN (Age Std)'!$J$19:$J$23</c:f>
+                <c:numCache>
+                  <c:formatCode>General</c:formatCode>
+                  <c:ptCount val="5"/>
+                  <c:pt idx="0">
+                    <c:v>4.292784999999999E-2</c:v>
+                  </c:pt>
+                  <c:pt idx="1">
+                    <c:v>3.0527789999999944E-2</c:v>
+                  </c:pt>
+                  <c:pt idx="2">
+                    <c:v>4.1652890000000053E-2</c:v>
+                  </c:pt>
+                  <c:pt idx="3">
+                    <c:v>3.7689050000000002E-2</c:v>
+                  </c:pt>
+                  <c:pt idx="4">
+                    <c:v>5.8105889999999993E-2</c:v>
+                  </c:pt>
+                </c:numCache>
+              </c:numRef>
+            </c:plus>
+            <c:minus>
+              <c:numRef>
+                <c:f>'HTN (Age Std)'!$K$19:$K$23</c:f>
+                <c:numCache>
+                  <c:formatCode>General</c:formatCode>
+                  <c:ptCount val="5"/>
+                  <c:pt idx="0">
+                    <c:v>4.2927640000000045E-2</c:v>
+                  </c:pt>
+                  <c:pt idx="1">
+                    <c:v>3.0528050000000029E-2</c:v>
+                  </c:pt>
+                  <c:pt idx="2">
+                    <c:v>4.1652959999999961E-2</c:v>
+                  </c:pt>
+                  <c:pt idx="3">
+                    <c:v>3.7688310000000058E-2</c:v>
+                  </c:pt>
+                  <c:pt idx="4">
+                    <c:v>5.8105340000000005E-2</c:v>
+                  </c:pt>
+                </c:numCache>
+              </c:numRef>
+            </c:minus>
+            <c:spPr>
+              <a:noFill/>
+              <a:ln w="9525" cap="flat" cmpd="sng" algn="ctr">
+                <a:solidFill>
+                  <a:schemeClr val="tx1">
+                    <a:lumMod val="65000"/>
+                    <a:lumOff val="35000"/>
+                  </a:schemeClr>
+                </a:solidFill>
+                <a:round/>
+              </a:ln>
+              <a:effectLst/>
+            </c:spPr>
+          </c:errBars>
+          <c:val>
+            <c:numRef>
+              <c:f>'HTN (Age Std)'!$D$31:$D$35</c:f>
+              <c:numCache>
+                <c:formatCode>0.0%</c:formatCode>
+                <c:ptCount val="5"/>
+                <c:pt idx="0">
+                  <c:v>0.49901200000000001</c:v>
+                </c:pt>
+                <c:pt idx="1">
+                  <c:v>0.476439</c:v>
+                </c:pt>
+                <c:pt idx="2">
+                  <c:v>0.46994399999999997</c:v>
+                </c:pt>
+                <c:pt idx="3">
+                  <c:v>0.47146399999999999</c:v>
+                </c:pt>
+                <c:pt idx="4">
+                  <c:v>0.49913400000000002</c:v>
+                </c:pt>
+              </c:numCache>
+            </c:numRef>
+          </c:val>
+          <c:smooth val="0"/>
+          <c:extLst>
+            <c:ext xmlns:c16="http://schemas.microsoft.com/office/drawing/2014/chart" uri="{C3380CC4-5D6E-409C-BE32-E72D297353CC}">
+              <c16:uniqueId val="{00000002-C728-4248-B449-4DC8A4F3E1C3}"/>
+            </c:ext>
+          </c:extLst>
+        </c:ser>
+        <c:ser>
           <c:idx val="0"/>
-          <c:order val="0"/>
+          <c:order val="2"/>
           <c:tx>
             <c:strRef>
               <c:f>'HTN (Age Std)'!$C$30</c:f>
@@ -984,278 +1256,6 @@
           <c:extLst>
             <c:ext xmlns:c16="http://schemas.microsoft.com/office/drawing/2014/chart" uri="{C3380CC4-5D6E-409C-BE32-E72D297353CC}">
               <c16:uniqueId val="{00000000-C728-4248-B449-4DC8A4F3E1C3}"/>
-            </c:ext>
-          </c:extLst>
-        </c:ser>
-        <c:ser>
-          <c:idx val="1"/>
-          <c:order val="1"/>
-          <c:tx>
-            <c:strRef>
-              <c:f>'HTN (Age Std)'!$E$30</c:f>
-              <c:strCache>
-                <c:ptCount val="1"/>
-                <c:pt idx="0">
-                  <c:v>CKD</c:v>
-                </c:pt>
-              </c:strCache>
-            </c:strRef>
-          </c:tx>
-          <c:spPr>
-            <a:ln w="44450" cap="rnd">
-              <a:solidFill>
-                <a:schemeClr val="accent2"/>
-              </a:solidFill>
-              <a:round/>
-            </a:ln>
-            <a:effectLst/>
-          </c:spPr>
-          <c:marker>
-            <c:symbol val="circle"/>
-            <c:size val="5"/>
-            <c:spPr>
-              <a:solidFill>
-                <a:schemeClr val="accent2"/>
-              </a:solidFill>
-              <a:ln w="9525">
-                <a:solidFill>
-                  <a:schemeClr val="accent2"/>
-                </a:solidFill>
-              </a:ln>
-              <a:effectLst/>
-            </c:spPr>
-          </c:marker>
-          <c:errBars>
-            <c:errDir val="y"/>
-            <c:errBarType val="both"/>
-            <c:errValType val="cust"/>
-            <c:noEndCap val="0"/>
-            <c:plus>
-              <c:numRef>
-                <c:f>'HTN (Age Std)'!$J$14:$J$18</c:f>
-                <c:numCache>
-                  <c:formatCode>General</c:formatCode>
-                  <c:ptCount val="5"/>
-                  <c:pt idx="0">
-                    <c:v>1.9787810000000017E-2</c:v>
-                  </c:pt>
-                  <c:pt idx="1">
-                    <c:v>1.7944889999999991E-2</c:v>
-                  </c:pt>
-                  <c:pt idx="2">
-                    <c:v>1.5681719999999955E-2</c:v>
-                  </c:pt>
-                  <c:pt idx="3">
-                    <c:v>1.6614069999999981E-2</c:v>
-                  </c:pt>
-                  <c:pt idx="4">
-                    <c:v>2.6458200000000043E-2</c:v>
-                  </c:pt>
-                </c:numCache>
-              </c:numRef>
-            </c:plus>
-            <c:minus>
-              <c:numRef>
-                <c:f>'HTN (Age Std)'!$K$14:$K$18</c:f>
-                <c:numCache>
-                  <c:formatCode>General</c:formatCode>
-                  <c:ptCount val="5"/>
-                  <c:pt idx="0">
-                    <c:v>1.9788290000000042E-2</c:v>
-                  </c:pt>
-                  <c:pt idx="1">
-                    <c:v>1.7945500000000003E-2</c:v>
-                  </c:pt>
-                  <c:pt idx="2">
-                    <c:v>1.5682180000000046E-2</c:v>
-                  </c:pt>
-                  <c:pt idx="3">
-                    <c:v>1.661456E-2</c:v>
-                  </c:pt>
-                  <c:pt idx="4">
-                    <c:v>2.645829999999999E-2</c:v>
-                  </c:pt>
-                </c:numCache>
-              </c:numRef>
-            </c:minus>
-            <c:spPr>
-              <a:noFill/>
-              <a:ln w="9525" cap="flat" cmpd="sng" algn="ctr">
-                <a:solidFill>
-                  <a:schemeClr val="tx1">
-                    <a:lumMod val="65000"/>
-                    <a:lumOff val="35000"/>
-                  </a:schemeClr>
-                </a:solidFill>
-                <a:round/>
-              </a:ln>
-              <a:effectLst/>
-            </c:spPr>
-          </c:errBars>
-          <c:val>
-            <c:numRef>
-              <c:f>'HTN (Age Std)'!$E$31:$E$35</c:f>
-              <c:numCache>
-                <c:formatCode>0.0%</c:formatCode>
-                <c:ptCount val="5"/>
-                <c:pt idx="0">
-                  <c:v>0.63952500000000001</c:v>
-                </c:pt>
-                <c:pt idx="1">
-                  <c:v>0.645366</c:v>
-                </c:pt>
-                <c:pt idx="2">
-                  <c:v>0.621062</c:v>
-                </c:pt>
-                <c:pt idx="3">
-                  <c:v>0.64002999999999999</c:v>
-                </c:pt>
-                <c:pt idx="4">
-                  <c:v>0.65057500000000001</c:v>
-                </c:pt>
-              </c:numCache>
-            </c:numRef>
-          </c:val>
-          <c:smooth val="0"/>
-          <c:extLst>
-            <c:ext xmlns:c16="http://schemas.microsoft.com/office/drawing/2014/chart" uri="{C3380CC4-5D6E-409C-BE32-E72D297353CC}">
-              <c16:uniqueId val="{00000001-C728-4248-B449-4DC8A4F3E1C3}"/>
-            </c:ext>
-          </c:extLst>
-        </c:ser>
-        <c:ser>
-          <c:idx val="2"/>
-          <c:order val="2"/>
-          <c:tx>
-            <c:strRef>
-              <c:f>'HTN (Age Std)'!$D$30</c:f>
-              <c:strCache>
-                <c:ptCount val="1"/>
-                <c:pt idx="0">
-                  <c:v>No CKD</c:v>
-                </c:pt>
-              </c:strCache>
-            </c:strRef>
-          </c:tx>
-          <c:spPr>
-            <a:ln w="44450" cap="rnd">
-              <a:solidFill>
-                <a:schemeClr val="accent3"/>
-              </a:solidFill>
-              <a:round/>
-            </a:ln>
-            <a:effectLst/>
-          </c:spPr>
-          <c:marker>
-            <c:symbol val="circle"/>
-            <c:size val="5"/>
-            <c:spPr>
-              <a:solidFill>
-                <a:schemeClr val="accent3"/>
-              </a:solidFill>
-              <a:ln w="9525">
-                <a:solidFill>
-                  <a:schemeClr val="accent3"/>
-                </a:solidFill>
-              </a:ln>
-              <a:effectLst/>
-            </c:spPr>
-          </c:marker>
-          <c:errBars>
-            <c:errDir val="y"/>
-            <c:errBarType val="both"/>
-            <c:errValType val="cust"/>
-            <c:noEndCap val="0"/>
-            <c:plus>
-              <c:numRef>
-                <c:f>'HTN (Age Std)'!$J$19:$J$23</c:f>
-                <c:numCache>
-                  <c:formatCode>General</c:formatCode>
-                  <c:ptCount val="5"/>
-                  <c:pt idx="0">
-                    <c:v>4.292784999999999E-2</c:v>
-                  </c:pt>
-                  <c:pt idx="1">
-                    <c:v>3.0527789999999944E-2</c:v>
-                  </c:pt>
-                  <c:pt idx="2">
-                    <c:v>4.1652890000000053E-2</c:v>
-                  </c:pt>
-                  <c:pt idx="3">
-                    <c:v>3.7689050000000002E-2</c:v>
-                  </c:pt>
-                  <c:pt idx="4">
-                    <c:v>5.8105889999999993E-2</c:v>
-                  </c:pt>
-                </c:numCache>
-              </c:numRef>
-            </c:plus>
-            <c:minus>
-              <c:numRef>
-                <c:f>'HTN (Age Std)'!$K$19:$K$23</c:f>
-                <c:numCache>
-                  <c:formatCode>General</c:formatCode>
-                  <c:ptCount val="5"/>
-                  <c:pt idx="0">
-                    <c:v>4.2927640000000045E-2</c:v>
-                  </c:pt>
-                  <c:pt idx="1">
-                    <c:v>3.0528050000000029E-2</c:v>
-                  </c:pt>
-                  <c:pt idx="2">
-                    <c:v>4.1652959999999961E-2</c:v>
-                  </c:pt>
-                  <c:pt idx="3">
-                    <c:v>3.7688310000000058E-2</c:v>
-                  </c:pt>
-                  <c:pt idx="4">
-                    <c:v>5.8105340000000005E-2</c:v>
-                  </c:pt>
-                </c:numCache>
-              </c:numRef>
-            </c:minus>
-            <c:spPr>
-              <a:noFill/>
-              <a:ln w="9525" cap="flat" cmpd="sng" algn="ctr">
-                <a:solidFill>
-                  <a:schemeClr val="tx1">
-                    <a:lumMod val="65000"/>
-                    <a:lumOff val="35000"/>
-                  </a:schemeClr>
-                </a:solidFill>
-                <a:round/>
-              </a:ln>
-              <a:effectLst/>
-            </c:spPr>
-          </c:errBars>
-          <c:val>
-            <c:numRef>
-              <c:f>'HTN (Age Std)'!$D$31:$D$35</c:f>
-              <c:numCache>
-                <c:formatCode>0.0%</c:formatCode>
-                <c:ptCount val="5"/>
-                <c:pt idx="0">
-                  <c:v>0.49901200000000001</c:v>
-                </c:pt>
-                <c:pt idx="1">
-                  <c:v>0.476439</c:v>
-                </c:pt>
-                <c:pt idx="2">
-                  <c:v>0.46994399999999997</c:v>
-                </c:pt>
-                <c:pt idx="3">
-                  <c:v>0.47146399999999999</c:v>
-                </c:pt>
-                <c:pt idx="4">
-                  <c:v>0.49913400000000002</c:v>
-                </c:pt>
-              </c:numCache>
-            </c:numRef>
-          </c:val>
-          <c:smooth val="0"/>
-          <c:extLst>
-            <c:ext xmlns:c16="http://schemas.microsoft.com/office/drawing/2014/chart" uri="{C3380CC4-5D6E-409C-BE32-E72D297353CC}">
-              <c16:uniqueId val="{00000002-C728-4248-B449-4DC8A4F3E1C3}"/>
             </c:ext>
           </c:extLst>
         </c:ser>
@@ -1359,8 +1359,8 @@
                   </a:defRPr>
                 </a:pPr>
                 <a:r>
-                  <a:rPr lang="en-US"/>
-                  <a:t>% Hypertension</a:t>
+                  <a:rPr lang="en-US" dirty="0"/>
+                  <a:t>Hypertension (%)</a:t>
                 </a:r>
               </a:p>
             </c:rich>
@@ -1526,7 +1526,7 @@
               <c:strCache>
                 <c:ptCount val="1"/>
                 <c:pt idx="0">
-                  <c:v>18 to 39 years</c:v>
+                  <c:v>18-39 years</c:v>
                 </c:pt>
               </c:strCache>
             </c:strRef>
@@ -1685,7 +1685,7 @@
               <c:strCache>
                 <c:ptCount val="1"/>
                 <c:pt idx="0">
-                  <c:v>40 to 59 years</c:v>
+                  <c:v>40-59 years</c:v>
                 </c:pt>
               </c:strCache>
             </c:strRef>
@@ -1844,7 +1844,7 @@
               <c:strCache>
                 <c:ptCount val="1"/>
                 <c:pt idx="0">
-                  <c:v>60 to 69 years</c:v>
+                  <c:v>60-69 years</c:v>
                 </c:pt>
               </c:strCache>
             </c:strRef>
@@ -2253,9 +2253,14 @@
                   </a:defRPr>
                 </a:pPr>
                 <a:r>
-                  <a:rPr lang="en-US"/>
-                  <a:t>% Hypertension</a:t>
+                  <a:rPr lang="en-US" sz="2000" b="0" i="0" baseline="0" dirty="0">
+                    <a:effectLst/>
+                  </a:rPr>
+                  <a:t>Anemia among adults with CKD  (%) </a:t>
                 </a:r>
+                <a:endParaRPr lang="en-US" sz="2800" dirty="0">
+                  <a:effectLst/>
+                </a:endParaRPr>
               </a:p>
             </c:rich>
           </c:tx>
@@ -2828,9 +2833,14 @@
                   </a:defRPr>
                 </a:pPr>
                 <a:r>
-                  <a:rPr lang="en-US" dirty="0"/>
-                  <a:t>% Hypertension</a:t>
+                  <a:rPr lang="en-US" sz="2000" b="0" i="0" baseline="0" dirty="0">
+                    <a:effectLst/>
+                  </a:rPr>
+                  <a:t>Anemia among adults with CKD  (%) </a:t>
                 </a:r>
+                <a:endParaRPr lang="en-US" sz="2800" dirty="0">
+                  <a:effectLst/>
+                </a:endParaRPr>
               </a:p>
             </c:rich>
           </c:tx>
@@ -2987,8 +2997,326 @@
         <c:grouping val="standard"/>
         <c:varyColors val="0"/>
         <c:ser>
+          <c:idx val="3"/>
+          <c:order val="0"/>
+          <c:tx>
+            <c:strRef>
+              <c:f>'Race Ethnicity'!$K$10</c:f>
+              <c:strCache>
+                <c:ptCount val="1"/>
+                <c:pt idx="0">
+                  <c:v>Non-Hispanic White</c:v>
+                </c:pt>
+              </c:strCache>
+            </c:strRef>
+          </c:tx>
+          <c:spPr>
+            <a:ln w="44450" cap="rnd">
+              <a:solidFill>
+                <a:schemeClr val="accent4"/>
+              </a:solidFill>
+              <a:round/>
+            </a:ln>
+            <a:effectLst/>
+          </c:spPr>
+          <c:marker>
+            <c:symbol val="circle"/>
+            <c:size val="5"/>
+            <c:spPr>
+              <a:solidFill>
+                <a:schemeClr val="accent4"/>
+              </a:solidFill>
+              <a:ln w="9525">
+                <a:solidFill>
+                  <a:schemeClr val="accent4"/>
+                </a:solidFill>
+              </a:ln>
+              <a:effectLst/>
+            </c:spPr>
+          </c:marker>
+          <c:errBars>
+            <c:errDir val="y"/>
+            <c:errBarType val="both"/>
+            <c:errValType val="cust"/>
+            <c:noEndCap val="0"/>
+            <c:plus>
+              <c:numRef>
+                <c:f>'Race Ethnicity'!$R$19:$V$19</c:f>
+                <c:numCache>
+                  <c:formatCode>General</c:formatCode>
+                  <c:ptCount val="5"/>
+                  <c:pt idx="0">
+                    <c:v>4.1790990000000083E-2</c:v>
+                  </c:pt>
+                  <c:pt idx="1">
+                    <c:v>2.7562219999999971E-2</c:v>
+                  </c:pt>
+                  <c:pt idx="2">
+                    <c:v>5.4187769999999968E-2</c:v>
+                  </c:pt>
+                  <c:pt idx="3">
+                    <c:v>4.0100839999999915E-2</c:v>
+                  </c:pt>
+                  <c:pt idx="4">
+                    <c:v>4.4567369999999995E-2</c:v>
+                  </c:pt>
+                </c:numCache>
+              </c:numRef>
+            </c:plus>
+            <c:minus>
+              <c:numRef>
+                <c:f>'Race Ethnicity'!$R$10:$V$10</c:f>
+                <c:numCache>
+                  <c:formatCode>General</c:formatCode>
+                  <c:ptCount val="5"/>
+                  <c:pt idx="0">
+                    <c:v>4.1791530000000021E-2</c:v>
+                  </c:pt>
+                  <c:pt idx="1">
+                    <c:v>2.7562970000000075E-2</c:v>
+                  </c:pt>
+                  <c:pt idx="2">
+                    <c:v>5.4188540000000063E-2</c:v>
+                  </c:pt>
+                  <c:pt idx="3">
+                    <c:v>4.0101550000000041E-2</c:v>
+                  </c:pt>
+                  <c:pt idx="4">
+                    <c:v>4.4566810000000068E-2</c:v>
+                  </c:pt>
+                </c:numCache>
+              </c:numRef>
+            </c:minus>
+            <c:spPr>
+              <a:noFill/>
+              <a:ln w="9525" cap="flat" cmpd="sng" algn="ctr">
+                <a:solidFill>
+                  <a:schemeClr val="tx1">
+                    <a:lumMod val="65000"/>
+                    <a:lumOff val="35000"/>
+                  </a:schemeClr>
+                </a:solidFill>
+                <a:round/>
+              </a:ln>
+              <a:effectLst/>
+            </c:spPr>
+          </c:errBars>
+          <c:cat>
+            <c:strRef>
+              <c:f>'Race Ethnicity'!$L$6:$P$6</c:f>
+              <c:strCache>
+                <c:ptCount val="5"/>
+                <c:pt idx="0">
+                  <c:v>2001-2004</c:v>
+                </c:pt>
+                <c:pt idx="1">
+                  <c:v>2005-2008</c:v>
+                </c:pt>
+                <c:pt idx="2">
+                  <c:v>2009-2012</c:v>
+                </c:pt>
+                <c:pt idx="3">
+                  <c:v>2013-2016</c:v>
+                </c:pt>
+                <c:pt idx="4">
+                  <c:v>2017-2020</c:v>
+                </c:pt>
+              </c:strCache>
+            </c:strRef>
+          </c:cat>
+          <c:val>
+            <c:numRef>
+              <c:f>'Race Ethnicity'!$L$10:$P$10</c:f>
+              <c:numCache>
+                <c:formatCode>0.0%</c:formatCode>
+                <c:ptCount val="5"/>
+                <c:pt idx="0">
+                  <c:v>0.75616099999999997</c:v>
+                </c:pt>
+                <c:pt idx="1">
+                  <c:v>0.76337900000000003</c:v>
+                </c:pt>
+                <c:pt idx="2">
+                  <c:v>0.75677700000000003</c:v>
+                </c:pt>
+                <c:pt idx="3">
+                  <c:v>0.75551100000000004</c:v>
+                </c:pt>
+                <c:pt idx="4">
+                  <c:v>0.77426300000000003</c:v>
+                </c:pt>
+              </c:numCache>
+            </c:numRef>
+          </c:val>
+          <c:smooth val="0"/>
+          <c:extLst>
+            <c:ext xmlns:c16="http://schemas.microsoft.com/office/drawing/2014/chart" uri="{C3380CC4-5D6E-409C-BE32-E72D297353CC}">
+              <c16:uniqueId val="{00000003-9FDB-412C-AEB2-F6B29BF9DACC}"/>
+            </c:ext>
+          </c:extLst>
+        </c:ser>
+        <c:ser>
+          <c:idx val="1"/>
+          <c:order val="1"/>
+          <c:tx>
+            <c:strRef>
+              <c:f>'Race Ethnicity'!$K$8</c:f>
+              <c:strCache>
+                <c:ptCount val="1"/>
+                <c:pt idx="0">
+                  <c:v>Non-Hispanic Black</c:v>
+                </c:pt>
+              </c:strCache>
+            </c:strRef>
+          </c:tx>
+          <c:spPr>
+            <a:ln w="44450" cap="rnd">
+              <a:solidFill>
+                <a:schemeClr val="accent2"/>
+              </a:solidFill>
+              <a:round/>
+            </a:ln>
+            <a:effectLst/>
+          </c:spPr>
+          <c:marker>
+            <c:symbol val="circle"/>
+            <c:size val="5"/>
+            <c:spPr>
+              <a:solidFill>
+                <a:schemeClr val="accent2"/>
+              </a:solidFill>
+              <a:ln w="9525">
+                <a:solidFill>
+                  <a:schemeClr val="accent2"/>
+                </a:solidFill>
+              </a:ln>
+              <a:effectLst/>
+            </c:spPr>
+          </c:marker>
+          <c:errBars>
+            <c:errDir val="y"/>
+            <c:errBarType val="both"/>
+            <c:errValType val="cust"/>
+            <c:noEndCap val="0"/>
+            <c:plus>
+              <c:numRef>
+                <c:f>'Race Ethnicity'!$R$17:$V$17</c:f>
+                <c:numCache>
+                  <c:formatCode>General</c:formatCode>
+                  <c:ptCount val="5"/>
+                  <c:pt idx="0">
+                    <c:v>4.6476280000000036E-2</c:v>
+                  </c:pt>
+                  <c:pt idx="1">
+                    <c:v>3.0776499999999984E-2</c:v>
+                  </c:pt>
+                  <c:pt idx="2">
+                    <c:v>3.369314000000001E-2</c:v>
+                  </c:pt>
+                  <c:pt idx="3">
+                    <c:v>3.5538320000000012E-2</c:v>
+                  </c:pt>
+                  <c:pt idx="4">
+                    <c:v>3.0026409999999948E-2</c:v>
+                  </c:pt>
+                </c:numCache>
+              </c:numRef>
+            </c:plus>
+            <c:minus>
+              <c:numRef>
+                <c:f>'Race Ethnicity'!$R$8:$V$8</c:f>
+                <c:numCache>
+                  <c:formatCode>General</c:formatCode>
+                  <c:ptCount val="5"/>
+                  <c:pt idx="0">
+                    <c:v>4.6476720000000027E-2</c:v>
+                  </c:pt>
+                  <c:pt idx="1">
+                    <c:v>3.0777119999999991E-2</c:v>
+                  </c:pt>
+                  <c:pt idx="2">
+                    <c:v>3.3693250000000008E-2</c:v>
+                  </c:pt>
+                  <c:pt idx="3">
+                    <c:v>3.5539230000000033E-2</c:v>
+                  </c:pt>
+                  <c:pt idx="4">
+                    <c:v>3.0026300000000061E-2</c:v>
+                  </c:pt>
+                </c:numCache>
+              </c:numRef>
+            </c:minus>
+            <c:spPr>
+              <a:noFill/>
+              <a:ln w="9525" cap="flat" cmpd="sng" algn="ctr">
+                <a:solidFill>
+                  <a:schemeClr val="tx1">
+                    <a:lumMod val="65000"/>
+                    <a:lumOff val="35000"/>
+                  </a:schemeClr>
+                </a:solidFill>
+                <a:round/>
+              </a:ln>
+              <a:effectLst/>
+            </c:spPr>
+          </c:errBars>
+          <c:cat>
+            <c:strRef>
+              <c:f>'Race Ethnicity'!$L$6:$P$6</c:f>
+              <c:strCache>
+                <c:ptCount val="5"/>
+                <c:pt idx="0">
+                  <c:v>2001-2004</c:v>
+                </c:pt>
+                <c:pt idx="1">
+                  <c:v>2005-2008</c:v>
+                </c:pt>
+                <c:pt idx="2">
+                  <c:v>2009-2012</c:v>
+                </c:pt>
+                <c:pt idx="3">
+                  <c:v>2013-2016</c:v>
+                </c:pt>
+                <c:pt idx="4">
+                  <c:v>2017-2020</c:v>
+                </c:pt>
+              </c:strCache>
+            </c:strRef>
+          </c:cat>
+          <c:val>
+            <c:numRef>
+              <c:f>'Race Ethnicity'!$L$8:$P$8</c:f>
+              <c:numCache>
+                <c:formatCode>0.0%</c:formatCode>
+                <c:ptCount val="5"/>
+                <c:pt idx="0">
+                  <c:v>0.84888799999999998</c:v>
+                </c:pt>
+                <c:pt idx="1">
+                  <c:v>0.83907200000000004</c:v>
+                </c:pt>
+                <c:pt idx="2">
+                  <c:v>0.81275600000000003</c:v>
+                </c:pt>
+                <c:pt idx="3">
+                  <c:v>0.84941699999999998</c:v>
+                </c:pt>
+                <c:pt idx="4">
+                  <c:v>0.86936800000000003</c:v>
+                </c:pt>
+              </c:numCache>
+            </c:numRef>
+          </c:val>
+          <c:smooth val="0"/>
+          <c:extLst>
+            <c:ext xmlns:c16="http://schemas.microsoft.com/office/drawing/2014/chart" uri="{C3380CC4-5D6E-409C-BE32-E72D297353CC}">
+              <c16:uniqueId val="{00000001-9FDB-412C-AEB2-F6B29BF9DACC}"/>
+            </c:ext>
+          </c:extLst>
+        </c:ser>
+        <c:ser>
           <c:idx val="0"/>
-          <c:order val="0"/>
+          <c:order val="2"/>
           <c:tx>
             <c:strRef>
               <c:f>'Race Ethnicity'!$K$7</c:f>
@@ -3146,174 +3474,15 @@
           </c:extLst>
         </c:ser>
         <c:ser>
-          <c:idx val="1"/>
-          <c:order val="1"/>
-          <c:tx>
-            <c:strRef>
-              <c:f>'Race Ethnicity'!$K$8</c:f>
-              <c:strCache>
-                <c:ptCount val="1"/>
-                <c:pt idx="0">
-                  <c:v>NH Black</c:v>
-                </c:pt>
-              </c:strCache>
-            </c:strRef>
-          </c:tx>
-          <c:spPr>
-            <a:ln w="44450" cap="rnd">
-              <a:solidFill>
-                <a:schemeClr val="accent2"/>
-              </a:solidFill>
-              <a:round/>
-            </a:ln>
-            <a:effectLst/>
-          </c:spPr>
-          <c:marker>
-            <c:symbol val="circle"/>
-            <c:size val="5"/>
-            <c:spPr>
-              <a:solidFill>
-                <a:schemeClr val="accent2"/>
-              </a:solidFill>
-              <a:ln w="9525">
-                <a:solidFill>
-                  <a:schemeClr val="accent2"/>
-                </a:solidFill>
-              </a:ln>
-              <a:effectLst/>
-            </c:spPr>
-          </c:marker>
-          <c:errBars>
-            <c:errDir val="y"/>
-            <c:errBarType val="both"/>
-            <c:errValType val="cust"/>
-            <c:noEndCap val="0"/>
-            <c:plus>
-              <c:numRef>
-                <c:f>'Race Ethnicity'!$R$17:$V$17</c:f>
-                <c:numCache>
-                  <c:formatCode>General</c:formatCode>
-                  <c:ptCount val="5"/>
-                  <c:pt idx="0">
-                    <c:v>4.6476280000000036E-2</c:v>
-                  </c:pt>
-                  <c:pt idx="1">
-                    <c:v>3.0776499999999984E-2</c:v>
-                  </c:pt>
-                  <c:pt idx="2">
-                    <c:v>3.369314000000001E-2</c:v>
-                  </c:pt>
-                  <c:pt idx="3">
-                    <c:v>3.5538320000000012E-2</c:v>
-                  </c:pt>
-                  <c:pt idx="4">
-                    <c:v>3.0026409999999948E-2</c:v>
-                  </c:pt>
-                </c:numCache>
-              </c:numRef>
-            </c:plus>
-            <c:minus>
-              <c:numRef>
-                <c:f>'Race Ethnicity'!$R$8:$V$8</c:f>
-                <c:numCache>
-                  <c:formatCode>General</c:formatCode>
-                  <c:ptCount val="5"/>
-                  <c:pt idx="0">
-                    <c:v>4.6476720000000027E-2</c:v>
-                  </c:pt>
-                  <c:pt idx="1">
-                    <c:v>3.0777119999999991E-2</c:v>
-                  </c:pt>
-                  <c:pt idx="2">
-                    <c:v>3.3693250000000008E-2</c:v>
-                  </c:pt>
-                  <c:pt idx="3">
-                    <c:v>3.5539230000000033E-2</c:v>
-                  </c:pt>
-                  <c:pt idx="4">
-                    <c:v>3.0026300000000061E-2</c:v>
-                  </c:pt>
-                </c:numCache>
-              </c:numRef>
-            </c:minus>
-            <c:spPr>
-              <a:noFill/>
-              <a:ln w="9525" cap="flat" cmpd="sng" algn="ctr">
-                <a:solidFill>
-                  <a:schemeClr val="tx1">
-                    <a:lumMod val="65000"/>
-                    <a:lumOff val="35000"/>
-                  </a:schemeClr>
-                </a:solidFill>
-                <a:round/>
-              </a:ln>
-              <a:effectLst/>
-            </c:spPr>
-          </c:errBars>
-          <c:cat>
-            <c:strRef>
-              <c:f>'Race Ethnicity'!$L$6:$P$6</c:f>
-              <c:strCache>
-                <c:ptCount val="5"/>
-                <c:pt idx="0">
-                  <c:v>2001-2004</c:v>
-                </c:pt>
-                <c:pt idx="1">
-                  <c:v>2005-2008</c:v>
-                </c:pt>
-                <c:pt idx="2">
-                  <c:v>2009-2012</c:v>
-                </c:pt>
-                <c:pt idx="3">
-                  <c:v>2013-2016</c:v>
-                </c:pt>
-                <c:pt idx="4">
-                  <c:v>2017-2020</c:v>
-                </c:pt>
-              </c:strCache>
-            </c:strRef>
-          </c:cat>
-          <c:val>
-            <c:numRef>
-              <c:f>'Race Ethnicity'!$L$8:$P$8</c:f>
-              <c:numCache>
-                <c:formatCode>0.0%</c:formatCode>
-                <c:ptCount val="5"/>
-                <c:pt idx="0">
-                  <c:v>0.84888799999999998</c:v>
-                </c:pt>
-                <c:pt idx="1">
-                  <c:v>0.83907200000000004</c:v>
-                </c:pt>
-                <c:pt idx="2">
-                  <c:v>0.81275600000000003</c:v>
-                </c:pt>
-                <c:pt idx="3">
-                  <c:v>0.84941699999999998</c:v>
-                </c:pt>
-                <c:pt idx="4">
-                  <c:v>0.86936800000000003</c:v>
-                </c:pt>
-              </c:numCache>
-            </c:numRef>
-          </c:val>
-          <c:smooth val="0"/>
-          <c:extLst>
-            <c:ext xmlns:c16="http://schemas.microsoft.com/office/drawing/2014/chart" uri="{C3380CC4-5D6E-409C-BE32-E72D297353CC}">
-              <c16:uniqueId val="{00000001-9FDB-412C-AEB2-F6B29BF9DACC}"/>
-            </c:ext>
-          </c:extLst>
-        </c:ser>
-        <c:ser>
           <c:idx val="2"/>
-          <c:order val="2"/>
+          <c:order val="3"/>
           <c:tx>
             <c:strRef>
               <c:f>'Race Ethnicity'!$K$9</c:f>
               <c:strCache>
                 <c:ptCount val="1"/>
                 <c:pt idx="0">
-                  <c:v>NH Other</c:v>
+                  <c:v>Other</c:v>
                 </c:pt>
               </c:strCache>
             </c:strRef>
@@ -3460,165 +3629,6 @@
           <c:extLst>
             <c:ext xmlns:c16="http://schemas.microsoft.com/office/drawing/2014/chart" uri="{C3380CC4-5D6E-409C-BE32-E72D297353CC}">
               <c16:uniqueId val="{00000002-9FDB-412C-AEB2-F6B29BF9DACC}"/>
-            </c:ext>
-          </c:extLst>
-        </c:ser>
-        <c:ser>
-          <c:idx val="3"/>
-          <c:order val="3"/>
-          <c:tx>
-            <c:strRef>
-              <c:f>'Race Ethnicity'!$K$10</c:f>
-              <c:strCache>
-                <c:ptCount val="1"/>
-                <c:pt idx="0">
-                  <c:v>NH White</c:v>
-                </c:pt>
-              </c:strCache>
-            </c:strRef>
-          </c:tx>
-          <c:spPr>
-            <a:ln w="44450" cap="rnd">
-              <a:solidFill>
-                <a:schemeClr val="accent4"/>
-              </a:solidFill>
-              <a:round/>
-            </a:ln>
-            <a:effectLst/>
-          </c:spPr>
-          <c:marker>
-            <c:symbol val="circle"/>
-            <c:size val="5"/>
-            <c:spPr>
-              <a:solidFill>
-                <a:schemeClr val="accent4"/>
-              </a:solidFill>
-              <a:ln w="9525">
-                <a:solidFill>
-                  <a:schemeClr val="accent4"/>
-                </a:solidFill>
-              </a:ln>
-              <a:effectLst/>
-            </c:spPr>
-          </c:marker>
-          <c:errBars>
-            <c:errDir val="y"/>
-            <c:errBarType val="both"/>
-            <c:errValType val="cust"/>
-            <c:noEndCap val="0"/>
-            <c:plus>
-              <c:numRef>
-                <c:f>'Race Ethnicity'!$R$19:$V$19</c:f>
-                <c:numCache>
-                  <c:formatCode>General</c:formatCode>
-                  <c:ptCount val="5"/>
-                  <c:pt idx="0">
-                    <c:v>4.1790990000000083E-2</c:v>
-                  </c:pt>
-                  <c:pt idx="1">
-                    <c:v>2.7562219999999971E-2</c:v>
-                  </c:pt>
-                  <c:pt idx="2">
-                    <c:v>5.4187769999999968E-2</c:v>
-                  </c:pt>
-                  <c:pt idx="3">
-                    <c:v>4.0100839999999915E-2</c:v>
-                  </c:pt>
-                  <c:pt idx="4">
-                    <c:v>4.4567369999999995E-2</c:v>
-                  </c:pt>
-                </c:numCache>
-              </c:numRef>
-            </c:plus>
-            <c:minus>
-              <c:numRef>
-                <c:f>'Race Ethnicity'!$R$10:$V$10</c:f>
-                <c:numCache>
-                  <c:formatCode>General</c:formatCode>
-                  <c:ptCount val="5"/>
-                  <c:pt idx="0">
-                    <c:v>4.1791530000000021E-2</c:v>
-                  </c:pt>
-                  <c:pt idx="1">
-                    <c:v>2.7562970000000075E-2</c:v>
-                  </c:pt>
-                  <c:pt idx="2">
-                    <c:v>5.4188540000000063E-2</c:v>
-                  </c:pt>
-                  <c:pt idx="3">
-                    <c:v>4.0101550000000041E-2</c:v>
-                  </c:pt>
-                  <c:pt idx="4">
-                    <c:v>4.4566810000000068E-2</c:v>
-                  </c:pt>
-                </c:numCache>
-              </c:numRef>
-            </c:minus>
-            <c:spPr>
-              <a:noFill/>
-              <a:ln w="9525" cap="flat" cmpd="sng" algn="ctr">
-                <a:solidFill>
-                  <a:schemeClr val="tx1">
-                    <a:lumMod val="65000"/>
-                    <a:lumOff val="35000"/>
-                  </a:schemeClr>
-                </a:solidFill>
-                <a:round/>
-              </a:ln>
-              <a:effectLst/>
-            </c:spPr>
-          </c:errBars>
-          <c:cat>
-            <c:strRef>
-              <c:f>'Race Ethnicity'!$L$6:$P$6</c:f>
-              <c:strCache>
-                <c:ptCount val="5"/>
-                <c:pt idx="0">
-                  <c:v>2001-2004</c:v>
-                </c:pt>
-                <c:pt idx="1">
-                  <c:v>2005-2008</c:v>
-                </c:pt>
-                <c:pt idx="2">
-                  <c:v>2009-2012</c:v>
-                </c:pt>
-                <c:pt idx="3">
-                  <c:v>2013-2016</c:v>
-                </c:pt>
-                <c:pt idx="4">
-                  <c:v>2017-2020</c:v>
-                </c:pt>
-              </c:strCache>
-            </c:strRef>
-          </c:cat>
-          <c:val>
-            <c:numRef>
-              <c:f>'Race Ethnicity'!$L$10:$P$10</c:f>
-              <c:numCache>
-                <c:formatCode>0.0%</c:formatCode>
-                <c:ptCount val="5"/>
-                <c:pt idx="0">
-                  <c:v>0.75616099999999997</c:v>
-                </c:pt>
-                <c:pt idx="1">
-                  <c:v>0.76337900000000003</c:v>
-                </c:pt>
-                <c:pt idx="2">
-                  <c:v>0.75677700000000003</c:v>
-                </c:pt>
-                <c:pt idx="3">
-                  <c:v>0.75551100000000004</c:v>
-                </c:pt>
-                <c:pt idx="4">
-                  <c:v>0.77426300000000003</c:v>
-                </c:pt>
-              </c:numCache>
-            </c:numRef>
-          </c:val>
-          <c:smooth val="0"/>
-          <c:extLst>
-            <c:ext xmlns:c16="http://schemas.microsoft.com/office/drawing/2014/chart" uri="{C3380CC4-5D6E-409C-BE32-E72D297353CC}">
-              <c16:uniqueId val="{00000003-9FDB-412C-AEB2-F6B29BF9DACC}"/>
             </c:ext>
           </c:extLst>
         </c:ser>
@@ -3721,9 +3731,14 @@
                   </a:defRPr>
                 </a:pPr>
                 <a:r>
-                  <a:rPr lang="en-US"/>
-                  <a:t>% Hypertension</a:t>
+                  <a:rPr lang="en-US" sz="2000" b="0" i="0" baseline="0" dirty="0">
+                    <a:effectLst/>
+                  </a:rPr>
+                  <a:t>Anemia among adults with CKD  (%) </a:t>
                 </a:r>
+                <a:endParaRPr lang="en-US" sz="2800" dirty="0">
+                  <a:effectLst/>
+                </a:endParaRPr>
               </a:p>
             </c:rich>
           </c:tx>
@@ -6938,7 +6953,7 @@
           <a:p>
             <a:fld id="{CBC599C6-6DA8-4B73-ABE4-3668ADCAAA56}" type="datetimeFigureOut">
               <a:rPr lang="en-US" smtClean="0"/>
-              <a:t>9/23/2025</a:t>
+              <a:t>1/21/2026</a:t>
             </a:fld>
             <a:endParaRPr lang="en-US"/>
           </a:p>
@@ -7146,7 +7161,7 @@
           <a:p>
             <a:fld id="{CBC599C6-6DA8-4B73-ABE4-3668ADCAAA56}" type="datetimeFigureOut">
               <a:rPr lang="en-US" smtClean="0"/>
-              <a:t>9/23/2025</a:t>
+              <a:t>1/21/2026</a:t>
             </a:fld>
             <a:endParaRPr lang="en-US"/>
           </a:p>
@@ -7355,7 +7370,7 @@
           <a:p>
             <a:fld id="{CBC599C6-6DA8-4B73-ABE4-3668ADCAAA56}" type="datetimeFigureOut">
               <a:rPr lang="en-US" smtClean="0"/>
-              <a:t>9/23/2025</a:t>
+              <a:t>1/21/2026</a:t>
             </a:fld>
             <a:endParaRPr lang="en-US"/>
           </a:p>
@@ -7670,7 +7685,7 @@
           <a:p>
             <a:fld id="{CBC599C6-6DA8-4B73-ABE4-3668ADCAAA56}" type="datetimeFigureOut">
               <a:rPr lang="en-US" smtClean="0"/>
-              <a:t>9/23/2025</a:t>
+              <a:t>1/21/2026</a:t>
             </a:fld>
             <a:endParaRPr lang="en-US"/>
           </a:p>
@@ -7976,7 +7991,7 @@
           <a:p>
             <a:fld id="{CBC599C6-6DA8-4B73-ABE4-3668ADCAAA56}" type="datetimeFigureOut">
               <a:rPr lang="en-US" smtClean="0"/>
-              <a:t>9/23/2025</a:t>
+              <a:t>1/21/2026</a:t>
             </a:fld>
             <a:endParaRPr lang="en-US"/>
           </a:p>
@@ -8424,7 +8439,7 @@
           <a:p>
             <a:fld id="{CBC599C6-6DA8-4B73-ABE4-3668ADCAAA56}" type="datetimeFigureOut">
               <a:rPr lang="en-US" smtClean="0"/>
-              <a:t>9/23/2025</a:t>
+              <a:t>1/21/2026</a:t>
             </a:fld>
             <a:endParaRPr lang="en-US"/>
           </a:p>
@@ -8606,7 +8621,7 @@
           <a:p>
             <a:fld id="{CBC599C6-6DA8-4B73-ABE4-3668ADCAAA56}" type="datetimeFigureOut">
               <a:rPr lang="en-US" smtClean="0"/>
-              <a:t>9/23/2025</a:t>
+              <a:t>1/21/2026</a:t>
             </a:fld>
             <a:endParaRPr lang="en-US"/>
           </a:p>
@@ -8755,7 +8770,7 @@
           <a:p>
             <a:fld id="{CBC599C6-6DA8-4B73-ABE4-3668ADCAAA56}" type="datetimeFigureOut">
               <a:rPr lang="en-US" smtClean="0"/>
-              <a:t>9/23/2025</a:t>
+              <a:t>1/21/2026</a:t>
             </a:fld>
             <a:endParaRPr lang="en-US"/>
           </a:p>
@@ -9103,7 +9118,7 @@
           <a:p>
             <a:fld id="{CBC599C6-6DA8-4B73-ABE4-3668ADCAAA56}" type="datetimeFigureOut">
               <a:rPr lang="en-US" smtClean="0"/>
-              <a:t>9/23/2025</a:t>
+              <a:t>1/21/2026</a:t>
             </a:fld>
             <a:endParaRPr lang="en-US"/>
           </a:p>
@@ -9431,7 +9446,7 @@
           <a:p>
             <a:fld id="{CBC599C6-6DA8-4B73-ABE4-3668ADCAAA56}" type="datetimeFigureOut">
               <a:rPr lang="en-US" smtClean="0"/>
-              <a:t>9/23/2025</a:t>
+              <a:t>1/21/2026</a:t>
             </a:fld>
             <a:endParaRPr lang="en-US"/>
           </a:p>
@@ -9709,7 +9724,7 @@
           <a:p>
             <a:fld id="{CBC599C6-6DA8-4B73-ABE4-3668ADCAAA56}" type="datetimeFigureOut">
               <a:rPr lang="en-US" smtClean="0"/>
-              <a:t>9/23/2025</a:t>
+              <a:t>1/21/2026</a:t>
             </a:fld>
             <a:endParaRPr lang="en-US"/>
           </a:p>
@@ -10202,7 +10217,7 @@
                 <a:ea typeface="Open Sans" panose="020B0606030504020204" pitchFamily="34" charset="0"/>
                 <a:cs typeface="Open Sans" panose="020B0606030504020204" pitchFamily="34" charset="0"/>
               </a:rPr>
-              <a:t>During 2001–March 2020, crude prevalence of hypertension increased from 49.9% to 53.3% in the US adult population. Hypertension was higher among adults with CKD for both crude and age-standardized prevalence, with the crude burden at its highest level in recent years at 78.0% among adults with CKD. Hypertension among those with CKD was more prevalent with older age, male sex, and Non-Hispanic Black race.</a:t>
+              <a:t>During 2001–March 2020, crude prevalence of hypertension increased from 49.9% to 53.3% in the U.S. adult population. Hypertension prevalence was higher among adults with CKD for both crude and age-standardized prevalence, with the crude burden at its highest level in recent years at 78.0% among adults with CKD. Hypertension prevalence (crude) appeared higher among older, male, and non-Hispanic Black adults.</a:t>
             </a:r>
           </a:p>
           <a:p>
@@ -10350,7 +10365,7 @@
           <a:p>
             <a:r>
               <a:rPr lang="en-US" b="1" dirty="0"/>
-              <a:t>Crude Trends in Prevalence of Hypertension, by CKD</a:t>
+              <a:t>Trends in Prevalence of Hypertension by CKD, Crude</a:t>
             </a:r>
           </a:p>
         </p:txBody>
@@ -10367,7 +10382,13 @@
           <p:cNvGraphicFramePr>
             <a:graphicFrameLocks/>
           </p:cNvGraphicFramePr>
-          <p:nvPr/>
+          <p:nvPr>
+            <p:extLst>
+              <p:ext uri="{D42A27DB-BD31-4B8C-83A1-F6EECF244321}">
+                <p14:modId xmlns:p14="http://schemas.microsoft.com/office/powerpoint/2010/main" val="77588999"/>
+              </p:ext>
+            </p:extLst>
+          </p:nvPr>
         </p:nvGraphicFramePr>
         <p:xfrm>
           <a:off x="381000" y="1690688"/>
@@ -10433,8 +10454,8 @@
           <a:lstStyle/>
           <a:p>
             <a:r>
-              <a:rPr lang="en-US" b="1"/>
-              <a:t>Age-Standardized Trends in Prevalence of Hypertension, by CKD</a:t>
+              <a:rPr lang="en-US" b="1" dirty="0"/>
+              <a:t>Trends in Prevalence of Hypertension by CKD, Age-Standardized</a:t>
             </a:r>
           </a:p>
         </p:txBody>
@@ -10451,7 +10472,13 @@
           <p:cNvGraphicFramePr>
             <a:graphicFrameLocks/>
           </p:cNvGraphicFramePr>
-          <p:nvPr/>
+          <p:nvPr>
+            <p:extLst>
+              <p:ext uri="{D42A27DB-BD31-4B8C-83A1-F6EECF244321}">
+                <p14:modId xmlns:p14="http://schemas.microsoft.com/office/powerpoint/2010/main" val="3913340006"/>
+              </p:ext>
+            </p:extLst>
+          </p:nvPr>
         </p:nvGraphicFramePr>
         <p:xfrm>
           <a:off x="381000" y="1690688"/>
@@ -10517,8 +10544,8 @@
           <a:lstStyle/>
           <a:p>
             <a:r>
-              <a:rPr lang="en-US" b="1"/>
-              <a:t>Crude Trends in Prevalence of Hypertension in Adults with CKD, by Age</a:t>
+              <a:rPr lang="en-US" b="1" dirty="0"/>
+              <a:t>Trends in Prevalence of Hypertension in Adults with CKD by Age, Crude</a:t>
             </a:r>
           </a:p>
         </p:txBody>
@@ -10535,7 +10562,13 @@
           <p:cNvGraphicFramePr>
             <a:graphicFrameLocks/>
           </p:cNvGraphicFramePr>
-          <p:nvPr/>
+          <p:nvPr>
+            <p:extLst>
+              <p:ext uri="{D42A27DB-BD31-4B8C-83A1-F6EECF244321}">
+                <p14:modId xmlns:p14="http://schemas.microsoft.com/office/powerpoint/2010/main" val="1940623538"/>
+              </p:ext>
+            </p:extLst>
+          </p:nvPr>
         </p:nvGraphicFramePr>
         <p:xfrm>
           <a:off x="381000" y="1690688"/>
@@ -10601,8 +10634,8 @@
           <a:lstStyle/>
           <a:p>
             <a:r>
-              <a:rPr lang="en-US" b="1"/>
-              <a:t>Crude Trends in Prevalence of Hypertension in Adults with CKD, by Sex</a:t>
+              <a:rPr lang="en-US" b="1" dirty="0"/>
+              <a:t>Trends in Prevalence of Hypertension in Adults with CKD by Sex, Crude</a:t>
             </a:r>
           </a:p>
         </p:txBody>
@@ -10619,7 +10652,13 @@
           <p:cNvGraphicFramePr>
             <a:graphicFrameLocks/>
           </p:cNvGraphicFramePr>
-          <p:nvPr/>
+          <p:nvPr>
+            <p:extLst>
+              <p:ext uri="{D42A27DB-BD31-4B8C-83A1-F6EECF244321}">
+                <p14:modId xmlns:p14="http://schemas.microsoft.com/office/powerpoint/2010/main" val="334413097"/>
+              </p:ext>
+            </p:extLst>
+          </p:nvPr>
         </p:nvGraphicFramePr>
         <p:xfrm>
           <a:off x="381000" y="1690688"/>
@@ -10685,8 +10724,8 @@
           <a:lstStyle/>
           <a:p>
             <a:r>
-              <a:rPr lang="en-US" b="1"/>
-              <a:t>Crude Trends in Prevalence of Hypertension in Adults with CKD, by Race/Ethnicity</a:t>
+              <a:rPr lang="en-US" b="1" dirty="0"/>
+              <a:t>Trends in Prevalence of Hypertension in Adults with CKD by Race/Ethnicity, Crude</a:t>
             </a:r>
           </a:p>
         </p:txBody>
@@ -10703,7 +10742,13 @@
           <p:cNvGraphicFramePr>
             <a:graphicFrameLocks/>
           </p:cNvGraphicFramePr>
-          <p:nvPr/>
+          <p:nvPr>
+            <p:extLst>
+              <p:ext uri="{D42A27DB-BD31-4B8C-83A1-F6EECF244321}">
+                <p14:modId xmlns:p14="http://schemas.microsoft.com/office/powerpoint/2010/main" val="3233746034"/>
+              </p:ext>
+            </p:extLst>
+          </p:nvPr>
         </p:nvGraphicFramePr>
         <p:xfrm>
           <a:off x="381000" y="1690688"/>

--- a/CKDSurveillance/PPT/Q805.pptx
+++ b/CKDSurveillance/PPT/Q805.pptx
@@ -6953,7 +6953,7 @@
           <a:p>
             <a:fld id="{CBC599C6-6DA8-4B73-ABE4-3668ADCAAA56}" type="datetimeFigureOut">
               <a:rPr lang="en-US" smtClean="0"/>
-              <a:t>1/21/2026</a:t>
+              <a:t>2/26/2026</a:t>
             </a:fld>
             <a:endParaRPr lang="en-US"/>
           </a:p>
@@ -7161,7 +7161,7 @@
           <a:p>
             <a:fld id="{CBC599C6-6DA8-4B73-ABE4-3668ADCAAA56}" type="datetimeFigureOut">
               <a:rPr lang="en-US" smtClean="0"/>
-              <a:t>1/21/2026</a:t>
+              <a:t>2/26/2026</a:t>
             </a:fld>
             <a:endParaRPr lang="en-US"/>
           </a:p>
@@ -7370,7 +7370,7 @@
           <a:p>
             <a:fld id="{CBC599C6-6DA8-4B73-ABE4-3668ADCAAA56}" type="datetimeFigureOut">
               <a:rPr lang="en-US" smtClean="0"/>
-              <a:t>1/21/2026</a:t>
+              <a:t>2/26/2026</a:t>
             </a:fld>
             <a:endParaRPr lang="en-US"/>
           </a:p>
@@ -7685,7 +7685,7 @@
           <a:p>
             <a:fld id="{CBC599C6-6DA8-4B73-ABE4-3668ADCAAA56}" type="datetimeFigureOut">
               <a:rPr lang="en-US" smtClean="0"/>
-              <a:t>1/21/2026</a:t>
+              <a:t>2/26/2026</a:t>
             </a:fld>
             <a:endParaRPr lang="en-US"/>
           </a:p>
@@ -7991,7 +7991,7 @@
           <a:p>
             <a:fld id="{CBC599C6-6DA8-4B73-ABE4-3668ADCAAA56}" type="datetimeFigureOut">
               <a:rPr lang="en-US" smtClean="0"/>
-              <a:t>1/21/2026</a:t>
+              <a:t>2/26/2026</a:t>
             </a:fld>
             <a:endParaRPr lang="en-US"/>
           </a:p>
@@ -8439,7 +8439,7 @@
           <a:p>
             <a:fld id="{CBC599C6-6DA8-4B73-ABE4-3668ADCAAA56}" type="datetimeFigureOut">
               <a:rPr lang="en-US" smtClean="0"/>
-              <a:t>1/21/2026</a:t>
+              <a:t>2/26/2026</a:t>
             </a:fld>
             <a:endParaRPr lang="en-US"/>
           </a:p>
@@ -8621,7 +8621,7 @@
           <a:p>
             <a:fld id="{CBC599C6-6DA8-4B73-ABE4-3668ADCAAA56}" type="datetimeFigureOut">
               <a:rPr lang="en-US" smtClean="0"/>
-              <a:t>1/21/2026</a:t>
+              <a:t>2/26/2026</a:t>
             </a:fld>
             <a:endParaRPr lang="en-US"/>
           </a:p>
@@ -8770,7 +8770,7 @@
           <a:p>
             <a:fld id="{CBC599C6-6DA8-4B73-ABE4-3668ADCAAA56}" type="datetimeFigureOut">
               <a:rPr lang="en-US" smtClean="0"/>
-              <a:t>1/21/2026</a:t>
+              <a:t>2/26/2026</a:t>
             </a:fld>
             <a:endParaRPr lang="en-US"/>
           </a:p>
@@ -9118,7 +9118,7 @@
           <a:p>
             <a:fld id="{CBC599C6-6DA8-4B73-ABE4-3668ADCAAA56}" type="datetimeFigureOut">
               <a:rPr lang="en-US" smtClean="0"/>
-              <a:t>1/21/2026</a:t>
+              <a:t>2/26/2026</a:t>
             </a:fld>
             <a:endParaRPr lang="en-US"/>
           </a:p>
@@ -9446,7 +9446,7 @@
           <a:p>
             <a:fld id="{CBC599C6-6DA8-4B73-ABE4-3668ADCAAA56}" type="datetimeFigureOut">
               <a:rPr lang="en-US" smtClean="0"/>
-              <a:t>1/21/2026</a:t>
+              <a:t>2/26/2026</a:t>
             </a:fld>
             <a:endParaRPr lang="en-US"/>
           </a:p>
@@ -9724,7 +9724,7 @@
           <a:p>
             <a:fld id="{CBC599C6-6DA8-4B73-ABE4-3668ADCAAA56}" type="datetimeFigureOut">
               <a:rPr lang="en-US" smtClean="0"/>
-              <a:t>1/21/2026</a:t>
+              <a:t>2/26/2026</a:t>
             </a:fld>
             <a:endParaRPr lang="en-US"/>
           </a:p>
@@ -10168,11 +10168,7 @@
             </a:br>
             <a:r>
               <a:rPr lang="en-US" sz="4400" b="1" dirty="0"/>
-              <a:t>Trends in Prevalence </a:t>
-            </a:r>
-            <a:r>
-              <a:rPr lang="en-US" sz="4400" b="1"/>
-              <a:t>of Hypertension</a:t>
+              <a:t>Trends in Prevalence of Hypertension by CKD</a:t>
             </a:r>
             <a:br>
               <a:rPr lang="en-US" sz="4400" b="1" dirty="0"/>
@@ -10196,7 +10192,7 @@
         <p:spPr>
           <a:xfrm>
             <a:off x="324665" y="3879638"/>
-            <a:ext cx="11542644" cy="2308324"/>
+            <a:ext cx="11542644" cy="1754326"/>
           </a:xfrm>
           <a:prstGeom prst="rect">
             <a:avLst/>
@@ -10211,13 +10207,22 @@
           <a:p>
             <a:pPr algn="l"/>
             <a:r>
+              <a:rPr lang="en-US" sz="1800">
+                <a:effectLst/>
+                <a:latin typeface="Open Sans" panose="020B0606030504020204" pitchFamily="34" charset="0"/>
+                <a:ea typeface="Open Sans" panose="020B0606030504020204" pitchFamily="34" charset="0"/>
+                <a:cs typeface="Open Sans" panose="020B0606030504020204" pitchFamily="34" charset="0"/>
+              </a:rPr>
+              <a:t>Hypertension </a:t>
+            </a:r>
+            <a:r>
               <a:rPr lang="en-US" sz="1800" dirty="0">
                 <a:effectLst/>
                 <a:latin typeface="Open Sans" panose="020B0606030504020204" pitchFamily="34" charset="0"/>
                 <a:ea typeface="Open Sans" panose="020B0606030504020204" pitchFamily="34" charset="0"/>
                 <a:cs typeface="Open Sans" panose="020B0606030504020204" pitchFamily="34" charset="0"/>
               </a:rPr>
-              <a:t>During 2001–March 2020, crude prevalence of hypertension increased from 49.9% to 53.3% in the U.S. adult population. Hypertension prevalence was higher among adults with CKD for both crude and age-standardized prevalence, with the crude burden at its highest level in recent years at 78.0% among adults with CKD. Hypertension prevalence (crude) appeared higher among older, male, and non-Hispanic Black adults.</a:t>
+              <a:t>prevalence was higher among adults with CKD for both crude and age-standardized prevalence, with the crude burden at its highest level in recent years at 78.0% among adults with CKD. Hypertension prevalence (crude) appeared higher among older, male, and non-Hispanic Black adults.</a:t>
             </a:r>
           </a:p>
           <a:p>
